--- a/Semana6/Mutations.pptx
+++ b/Semana6/Mutations.pptx
@@ -5,7 +5,7 @@
     <p:sldMasterId id="2147483648" r:id="rId1"/>
   </p:sldMasterIdLst>
   <p:notesMasterIdLst>
-    <p:notesMasterId r:id="rId39"/>
+    <p:notesMasterId r:id="rId37"/>
   </p:notesMasterIdLst>
   <p:sldIdLst>
     <p:sldId id="256" r:id="rId2"/>
@@ -29,22 +29,20 @@
     <p:sldId id="267" r:id="rId20"/>
     <p:sldId id="276" r:id="rId21"/>
     <p:sldId id="258" r:id="rId22"/>
-    <p:sldId id="308" r:id="rId23"/>
-    <p:sldId id="285" r:id="rId24"/>
-    <p:sldId id="306" r:id="rId25"/>
-    <p:sldId id="259" r:id="rId26"/>
-    <p:sldId id="300" r:id="rId27"/>
-    <p:sldId id="286" r:id="rId28"/>
-    <p:sldId id="287" r:id="rId29"/>
-    <p:sldId id="288" r:id="rId30"/>
-    <p:sldId id="289" r:id="rId31"/>
-    <p:sldId id="290" r:id="rId32"/>
-    <p:sldId id="292" r:id="rId33"/>
-    <p:sldId id="294" r:id="rId34"/>
-    <p:sldId id="293" r:id="rId35"/>
-    <p:sldId id="295" r:id="rId36"/>
-    <p:sldId id="296" r:id="rId37"/>
-    <p:sldId id="297" r:id="rId38"/>
+    <p:sldId id="285" r:id="rId23"/>
+    <p:sldId id="259" r:id="rId24"/>
+    <p:sldId id="300" r:id="rId25"/>
+    <p:sldId id="286" r:id="rId26"/>
+    <p:sldId id="287" r:id="rId27"/>
+    <p:sldId id="288" r:id="rId28"/>
+    <p:sldId id="289" r:id="rId29"/>
+    <p:sldId id="290" r:id="rId30"/>
+    <p:sldId id="292" r:id="rId31"/>
+    <p:sldId id="294" r:id="rId32"/>
+    <p:sldId id="293" r:id="rId33"/>
+    <p:sldId id="295" r:id="rId34"/>
+    <p:sldId id="296" r:id="rId35"/>
+    <p:sldId id="297" r:id="rId36"/>
   </p:sldIdLst>
   <p:sldSz cx="12192000" cy="6858000"/>
   <p:notesSz cx="6858000" cy="9144000"/>
@@ -233,7 +231,7 @@
           <a:p>
             <a:fld id="{2EE367DC-3262-4D0B-8D11-C7A1FAC24D2E}" type="datetimeFigureOut">
               <a:rPr lang="es-CO" smtClean="0"/>
-              <a:t>2/10/2025</a:t>
+              <a:t>10/11/2025</a:t>
             </a:fld>
             <a:endParaRPr lang="es-CO"/>
           </a:p>
@@ -580,7 +578,7 @@
           <a:p>
             <a:fld id="{FD82D081-89AA-484D-8E11-71CBCE24BDCA}" type="slidenum">
               <a:rPr lang="en-US" smtClean="0"/>
-              <a:t>27</a:t>
+              <a:t>25</a:t>
             </a:fld>
             <a:endParaRPr lang="en-US"/>
           </a:p>
@@ -686,7 +684,7 @@
           <a:p>
             <a:fld id="{FD82D081-89AA-484D-8E11-71CBCE24BDCA}" type="slidenum">
               <a:rPr lang="en-US" smtClean="0"/>
-              <a:t>35</a:t>
+              <a:t>33</a:t>
             </a:fld>
             <a:endParaRPr lang="en-US"/>
           </a:p>
@@ -782,7 +780,7 @@
           <a:p>
             <a:fld id="{FD82D081-89AA-484D-8E11-71CBCE24BDCA}" type="slidenum">
               <a:rPr lang="en-US" smtClean="0"/>
-              <a:t>36</a:t>
+              <a:t>34</a:t>
             </a:fld>
             <a:endParaRPr lang="en-US"/>
           </a:p>
@@ -869,7 +867,7 @@
           <a:p>
             <a:fld id="{FD82D081-89AA-484D-8E11-71CBCE24BDCA}" type="slidenum">
               <a:rPr lang="en-US" smtClean="0"/>
-              <a:t>37</a:t>
+              <a:t>35</a:t>
             </a:fld>
             <a:endParaRPr lang="en-US"/>
           </a:p>
@@ -1037,7 +1035,7 @@
           <a:p>
             <a:fld id="{229D34C5-5A59-4CDA-9D5D-3C60273D4242}" type="datetimeFigureOut">
               <a:rPr lang="es-CO" smtClean="0"/>
-              <a:t>2/10/2025</a:t>
+              <a:t>10/11/2025</a:t>
             </a:fld>
             <a:endParaRPr lang="es-CO"/>
           </a:p>
@@ -1237,7 +1235,7 @@
           <a:p>
             <a:fld id="{229D34C5-5A59-4CDA-9D5D-3C60273D4242}" type="datetimeFigureOut">
               <a:rPr lang="es-CO" smtClean="0"/>
-              <a:t>2/10/2025</a:t>
+              <a:t>10/11/2025</a:t>
             </a:fld>
             <a:endParaRPr lang="es-CO"/>
           </a:p>
@@ -1447,7 +1445,7 @@
           <a:p>
             <a:fld id="{229D34C5-5A59-4CDA-9D5D-3C60273D4242}" type="datetimeFigureOut">
               <a:rPr lang="es-CO" smtClean="0"/>
-              <a:t>2/10/2025</a:t>
+              <a:t>10/11/2025</a:t>
             </a:fld>
             <a:endParaRPr lang="es-CO"/>
           </a:p>
@@ -1647,7 +1645,7 @@
           <a:p>
             <a:fld id="{229D34C5-5A59-4CDA-9D5D-3C60273D4242}" type="datetimeFigureOut">
               <a:rPr lang="es-CO" smtClean="0"/>
-              <a:t>2/10/2025</a:t>
+              <a:t>10/11/2025</a:t>
             </a:fld>
             <a:endParaRPr lang="es-CO"/>
           </a:p>
@@ -1923,7 +1921,7 @@
           <a:p>
             <a:fld id="{229D34C5-5A59-4CDA-9D5D-3C60273D4242}" type="datetimeFigureOut">
               <a:rPr lang="es-CO" smtClean="0"/>
-              <a:t>2/10/2025</a:t>
+              <a:t>10/11/2025</a:t>
             </a:fld>
             <a:endParaRPr lang="es-CO"/>
           </a:p>
@@ -2191,7 +2189,7 @@
           <a:p>
             <a:fld id="{229D34C5-5A59-4CDA-9D5D-3C60273D4242}" type="datetimeFigureOut">
               <a:rPr lang="es-CO" smtClean="0"/>
-              <a:t>2/10/2025</a:t>
+              <a:t>10/11/2025</a:t>
             </a:fld>
             <a:endParaRPr lang="es-CO"/>
           </a:p>
@@ -2606,7 +2604,7 @@
           <a:p>
             <a:fld id="{229D34C5-5A59-4CDA-9D5D-3C60273D4242}" type="datetimeFigureOut">
               <a:rPr lang="es-CO" smtClean="0"/>
-              <a:t>2/10/2025</a:t>
+              <a:t>10/11/2025</a:t>
             </a:fld>
             <a:endParaRPr lang="es-CO"/>
           </a:p>
@@ -2748,7 +2746,7 @@
           <a:p>
             <a:fld id="{229D34C5-5A59-4CDA-9D5D-3C60273D4242}" type="datetimeFigureOut">
               <a:rPr lang="es-CO" smtClean="0"/>
-              <a:t>2/10/2025</a:t>
+              <a:t>10/11/2025</a:t>
             </a:fld>
             <a:endParaRPr lang="es-CO"/>
           </a:p>
@@ -2861,7 +2859,7 @@
           <a:p>
             <a:fld id="{229D34C5-5A59-4CDA-9D5D-3C60273D4242}" type="datetimeFigureOut">
               <a:rPr lang="es-CO" smtClean="0"/>
-              <a:t>2/10/2025</a:t>
+              <a:t>10/11/2025</a:t>
             </a:fld>
             <a:endParaRPr lang="es-CO"/>
           </a:p>
@@ -3174,7 +3172,7 @@
           <a:p>
             <a:fld id="{229D34C5-5A59-4CDA-9D5D-3C60273D4242}" type="datetimeFigureOut">
               <a:rPr lang="es-CO" smtClean="0"/>
-              <a:t>2/10/2025</a:t>
+              <a:t>10/11/2025</a:t>
             </a:fld>
             <a:endParaRPr lang="es-CO"/>
           </a:p>
@@ -3463,7 +3461,7 @@
           <a:p>
             <a:fld id="{229D34C5-5A59-4CDA-9D5D-3C60273D4242}" type="datetimeFigureOut">
               <a:rPr lang="es-CO" smtClean="0"/>
-              <a:t>2/10/2025</a:t>
+              <a:t>10/11/2025</a:t>
             </a:fld>
             <a:endParaRPr lang="es-CO"/>
           </a:p>
@@ -3706,7 +3704,7 @@
           <a:p>
             <a:fld id="{229D34C5-5A59-4CDA-9D5D-3C60273D4242}" type="datetimeFigureOut">
               <a:rPr lang="es-CO" smtClean="0"/>
-              <a:t>2/10/2025</a:t>
+              <a:t>10/11/2025</a:t>
             </a:fld>
             <a:endParaRPr lang="es-CO"/>
           </a:p>
@@ -6351,86 +6349,6 @@
           <p:cNvPr id="2" name="Título 1">
             <a:extLst>
               <a:ext uri="{FF2B5EF4-FFF2-40B4-BE49-F238E27FC236}">
-                <a16:creationId xmlns:a16="http://schemas.microsoft.com/office/drawing/2014/main" id="{682A612A-6148-DE3E-FDF2-3356F03BCEDF}"/>
-              </a:ext>
-            </a:extLst>
-          </p:cNvPr>
-          <p:cNvSpPr>
-            <a:spLocks noGrp="1"/>
-          </p:cNvSpPr>
-          <p:nvPr>
-            <p:ph type="title"/>
-          </p:nvPr>
-        </p:nvSpPr>
-        <p:spPr/>
-        <p:txBody>
-          <a:bodyPr/>
-          <a:lstStyle/>
-          <a:p>
-            <a:endParaRPr lang="es-CO"/>
-          </a:p>
-        </p:txBody>
-      </p:sp>
-      <p:sp>
-        <p:nvSpPr>
-          <p:cNvPr id="3" name="Marcador de contenido 2">
-            <a:extLst>
-              <a:ext uri="{FF2B5EF4-FFF2-40B4-BE49-F238E27FC236}">
-                <a16:creationId xmlns:a16="http://schemas.microsoft.com/office/drawing/2014/main" id="{25F8192C-A5B4-FA42-0B93-C10C4628EAF6}"/>
-              </a:ext>
-            </a:extLst>
-          </p:cNvPr>
-          <p:cNvSpPr>
-            <a:spLocks noGrp="1"/>
-          </p:cNvSpPr>
-          <p:nvPr>
-            <p:ph idx="1"/>
-          </p:nvPr>
-        </p:nvSpPr>
-        <p:spPr/>
-        <p:txBody>
-          <a:bodyPr/>
-          <a:lstStyle/>
-          <a:p>
-            <a:endParaRPr lang="es-CO" dirty="0"/>
-          </a:p>
-        </p:txBody>
-      </p:sp>
-    </p:spTree>
-    <p:extLst>
-      <p:ext uri="{BB962C8B-B14F-4D97-AF65-F5344CB8AC3E}">
-        <p14:creationId xmlns:p14="http://schemas.microsoft.com/office/powerpoint/2010/main" val="1591723602"/>
-      </p:ext>
-    </p:extLst>
-  </p:cSld>
-  <p:clrMapOvr>
-    <a:masterClrMapping/>
-  </p:clrMapOvr>
-</p:sld>
-</file>
-
-<file path=ppt/slides/slide23.xml><?xml version="1.0" encoding="utf-8"?>
-<p:sld xmlns:a="http://schemas.openxmlformats.org/drawingml/2006/main" xmlns:r="http://schemas.openxmlformats.org/officeDocument/2006/relationships" xmlns:p="http://schemas.openxmlformats.org/presentationml/2006/main">
-  <p:cSld>
-    <p:spTree>
-      <p:nvGrpSpPr>
-        <p:cNvPr id="1" name=""/>
-        <p:cNvGrpSpPr/>
-        <p:nvPr/>
-      </p:nvGrpSpPr>
-      <p:grpSpPr>
-        <a:xfrm>
-          <a:off x="0" y="0"/>
-          <a:ext cx="0" cy="0"/>
-          <a:chOff x="0" y="0"/>
-          <a:chExt cx="0" cy="0"/>
-        </a:xfrm>
-      </p:grpSpPr>
-      <p:sp>
-        <p:nvSpPr>
-          <p:cNvPr id="2" name="Título 1">
-            <a:extLst>
-              <a:ext uri="{FF2B5EF4-FFF2-40B4-BE49-F238E27FC236}">
                 <a16:creationId xmlns:a16="http://schemas.microsoft.com/office/drawing/2014/main" id="{801865A7-031C-6015-10B4-1BBE8595A845}"/>
               </a:ext>
             </a:extLst>
@@ -6593,87 +6511,7 @@
 </p:sld>
 </file>
 
-<file path=ppt/slides/slide24.xml><?xml version="1.0" encoding="utf-8"?>
-<p:sld xmlns:a="http://schemas.openxmlformats.org/drawingml/2006/main" xmlns:r="http://schemas.openxmlformats.org/officeDocument/2006/relationships" xmlns:p="http://schemas.openxmlformats.org/presentationml/2006/main">
-  <p:cSld>
-    <p:spTree>
-      <p:nvGrpSpPr>
-        <p:cNvPr id="1" name=""/>
-        <p:cNvGrpSpPr/>
-        <p:nvPr/>
-      </p:nvGrpSpPr>
-      <p:grpSpPr>
-        <a:xfrm>
-          <a:off x="0" y="0"/>
-          <a:ext cx="0" cy="0"/>
-          <a:chOff x="0" y="0"/>
-          <a:chExt cx="0" cy="0"/>
-        </a:xfrm>
-      </p:grpSpPr>
-      <p:sp>
-        <p:nvSpPr>
-          <p:cNvPr id="2" name="Título 1">
-            <a:extLst>
-              <a:ext uri="{FF2B5EF4-FFF2-40B4-BE49-F238E27FC236}">
-                <a16:creationId xmlns:a16="http://schemas.microsoft.com/office/drawing/2014/main" id="{A17AF1B6-6379-C484-CBCF-42E75C5C7C1C}"/>
-              </a:ext>
-            </a:extLst>
-          </p:cNvPr>
-          <p:cNvSpPr>
-            <a:spLocks noGrp="1"/>
-          </p:cNvSpPr>
-          <p:nvPr>
-            <p:ph type="title"/>
-          </p:nvPr>
-        </p:nvSpPr>
-        <p:spPr/>
-        <p:txBody>
-          <a:bodyPr/>
-          <a:lstStyle/>
-          <a:p>
-            <a:endParaRPr lang="es-CO"/>
-          </a:p>
-        </p:txBody>
-      </p:sp>
-      <p:sp>
-        <p:nvSpPr>
-          <p:cNvPr id="3" name="Marcador de contenido 2">
-            <a:extLst>
-              <a:ext uri="{FF2B5EF4-FFF2-40B4-BE49-F238E27FC236}">
-                <a16:creationId xmlns:a16="http://schemas.microsoft.com/office/drawing/2014/main" id="{EA575D10-100C-9B31-BA63-E891B4784A43}"/>
-              </a:ext>
-            </a:extLst>
-          </p:cNvPr>
-          <p:cNvSpPr>
-            <a:spLocks noGrp="1"/>
-          </p:cNvSpPr>
-          <p:nvPr>
-            <p:ph idx="1"/>
-          </p:nvPr>
-        </p:nvSpPr>
-        <p:spPr/>
-        <p:txBody>
-          <a:bodyPr/>
-          <a:lstStyle/>
-          <a:p>
-            <a:endParaRPr lang="es-CO"/>
-          </a:p>
-        </p:txBody>
-      </p:sp>
-    </p:spTree>
-    <p:extLst>
-      <p:ext uri="{BB962C8B-B14F-4D97-AF65-F5344CB8AC3E}">
-        <p14:creationId xmlns:p14="http://schemas.microsoft.com/office/powerpoint/2010/main" val="3758855997"/>
-      </p:ext>
-    </p:extLst>
-  </p:cSld>
-  <p:clrMapOvr>
-    <a:masterClrMapping/>
-  </p:clrMapOvr>
-</p:sld>
-</file>
-
-<file path=ppt/slides/slide25.xml><?xml version="1.0" encoding="utf-8"?>
+<file path=ppt/slides/slide23.xml><?xml version="1.0" encoding="utf-8"?>
 <p:sld xmlns:a="http://schemas.openxmlformats.org/drawingml/2006/main" xmlns:r="http://schemas.openxmlformats.org/officeDocument/2006/relationships" xmlns:p="http://schemas.openxmlformats.org/presentationml/2006/main">
   <p:cSld>
     <p:spTree>
@@ -6783,7 +6621,7 @@
 </p:sld>
 </file>
 
-<file path=ppt/slides/slide26.xml><?xml version="1.0" encoding="utf-8"?>
+<file path=ppt/slides/slide24.xml><?xml version="1.0" encoding="utf-8"?>
 <p:sld xmlns:a="http://schemas.openxmlformats.org/drawingml/2006/main" xmlns:r="http://schemas.openxmlformats.org/officeDocument/2006/relationships" xmlns:p="http://schemas.openxmlformats.org/presentationml/2006/main">
   <p:cSld>
     <p:spTree>
@@ -6893,7 +6731,7 @@
 </p:sld>
 </file>
 
-<file path=ppt/slides/slide27.xml><?xml version="1.0" encoding="utf-8"?>
+<file path=ppt/slides/slide25.xml><?xml version="1.0" encoding="utf-8"?>
 <p:sld xmlns:a="http://schemas.openxmlformats.org/drawingml/2006/main" xmlns:r="http://schemas.openxmlformats.org/officeDocument/2006/relationships" xmlns:p="http://schemas.openxmlformats.org/presentationml/2006/main">
   <p:cSld>
     <p:spTree>
@@ -7077,7 +6915,7 @@
 </p:sld>
 </file>
 
-<file path=ppt/slides/slide28.xml><?xml version="1.0" encoding="utf-8"?>
+<file path=ppt/slides/slide26.xml><?xml version="1.0" encoding="utf-8"?>
 <p:sld xmlns:a="http://schemas.openxmlformats.org/drawingml/2006/main" xmlns:r="http://schemas.openxmlformats.org/officeDocument/2006/relationships" xmlns:p="http://schemas.openxmlformats.org/presentationml/2006/main">
   <p:cSld>
     <p:spTree>
@@ -7635,7 +7473,7 @@
 </p:sld>
 </file>
 
-<file path=ppt/slides/slide29.xml><?xml version="1.0" encoding="utf-8"?>
+<file path=ppt/slides/slide27.xml><?xml version="1.0" encoding="utf-8"?>
 <p:sld xmlns:a="http://schemas.openxmlformats.org/drawingml/2006/main" xmlns:r="http://schemas.openxmlformats.org/officeDocument/2006/relationships" xmlns:p="http://schemas.openxmlformats.org/presentationml/2006/main">
   <p:cSld>
     <p:spTree>
@@ -8767,121 +8605,7 @@
 </p:sld>
 </file>
 
-<file path=ppt/slides/slide3.xml><?xml version="1.0" encoding="utf-8"?>
-<p:sld xmlns:a="http://schemas.openxmlformats.org/drawingml/2006/main" xmlns:r="http://schemas.openxmlformats.org/officeDocument/2006/relationships" xmlns:p="http://schemas.openxmlformats.org/presentationml/2006/main">
-  <p:cSld>
-    <p:spTree>
-      <p:nvGrpSpPr>
-        <p:cNvPr id="1" name="">
-          <a:extLst>
-            <a:ext uri="{FF2B5EF4-FFF2-40B4-BE49-F238E27FC236}">
-              <a16:creationId xmlns:a16="http://schemas.microsoft.com/office/drawing/2014/main" id="{E620A041-FE82-840D-7717-64C398D70767}"/>
-            </a:ext>
-          </a:extLst>
-        </p:cNvPr>
-        <p:cNvGrpSpPr/>
-        <p:nvPr/>
-      </p:nvGrpSpPr>
-      <p:grpSpPr>
-        <a:xfrm>
-          <a:off x="0" y="0"/>
-          <a:ext cx="0" cy="0"/>
-          <a:chOff x="0" y="0"/>
-          <a:chExt cx="0" cy="0"/>
-        </a:xfrm>
-      </p:grpSpPr>
-      <p:sp>
-        <p:nvSpPr>
-          <p:cNvPr id="2" name="Título 1">
-            <a:extLst>
-              <a:ext uri="{FF2B5EF4-FFF2-40B4-BE49-F238E27FC236}">
-                <a16:creationId xmlns:a16="http://schemas.microsoft.com/office/drawing/2014/main" id="{5E300191-0A2C-CA51-1D38-1273110471D8}"/>
-              </a:ext>
-            </a:extLst>
-          </p:cNvPr>
-          <p:cNvSpPr>
-            <a:spLocks noGrp="1"/>
-          </p:cNvSpPr>
-          <p:nvPr>
-            <p:ph type="title"/>
-          </p:nvPr>
-        </p:nvSpPr>
-        <p:spPr/>
-        <p:txBody>
-          <a:bodyPr/>
-          <a:lstStyle/>
-          <a:p>
-            <a:r>
-              <a:rPr lang="es-ES" dirty="0" err="1"/>
-              <a:t>Different</a:t>
-            </a:r>
-            <a:r>
-              <a:rPr lang="es-ES" dirty="0"/>
-              <a:t> </a:t>
-            </a:r>
-            <a:r>
-              <a:rPr lang="es-ES" dirty="0" err="1"/>
-              <a:t>ways</a:t>
-            </a:r>
-            <a:r>
-              <a:rPr lang="es-ES" dirty="0"/>
-              <a:t> </a:t>
-            </a:r>
-            <a:r>
-              <a:rPr lang="es-ES" dirty="0" err="1"/>
-              <a:t>to</a:t>
-            </a:r>
-            <a:r>
-              <a:rPr lang="es-ES" dirty="0"/>
-              <a:t> produce </a:t>
-            </a:r>
-            <a:r>
-              <a:rPr lang="es-ES" dirty="0" err="1"/>
-              <a:t>mutations</a:t>
-            </a:r>
-            <a:endParaRPr lang="es-CO" dirty="0"/>
-          </a:p>
-        </p:txBody>
-      </p:sp>
-      <p:sp>
-        <p:nvSpPr>
-          <p:cNvPr id="4" name="Marcador de texto 3">
-            <a:extLst>
-              <a:ext uri="{FF2B5EF4-FFF2-40B4-BE49-F238E27FC236}">
-                <a16:creationId xmlns:a16="http://schemas.microsoft.com/office/drawing/2014/main" id="{448487E8-B8C0-FCFC-CF4A-453B4E23F8A9}"/>
-              </a:ext>
-            </a:extLst>
-          </p:cNvPr>
-          <p:cNvSpPr>
-            <a:spLocks noGrp="1"/>
-          </p:cNvSpPr>
-          <p:nvPr>
-            <p:ph type="body" idx="1"/>
-          </p:nvPr>
-        </p:nvSpPr>
-        <p:spPr/>
-        <p:txBody>
-          <a:bodyPr/>
-          <a:lstStyle/>
-          <a:p>
-            <a:endParaRPr lang="es-CO"/>
-          </a:p>
-        </p:txBody>
-      </p:sp>
-    </p:spTree>
-    <p:extLst>
-      <p:ext uri="{BB962C8B-B14F-4D97-AF65-F5344CB8AC3E}">
-        <p14:creationId xmlns:p14="http://schemas.microsoft.com/office/powerpoint/2010/main" val="1077930712"/>
-      </p:ext>
-    </p:extLst>
-  </p:cSld>
-  <p:clrMapOvr>
-    <a:masterClrMapping/>
-  </p:clrMapOvr>
-</p:sld>
-</file>
-
-<file path=ppt/slides/slide30.xml><?xml version="1.0" encoding="utf-8"?>
+<file path=ppt/slides/slide28.xml><?xml version="1.0" encoding="utf-8"?>
 <p:sld xmlns:a="http://schemas.openxmlformats.org/drawingml/2006/main" xmlns:r="http://schemas.openxmlformats.org/officeDocument/2006/relationships" xmlns:p="http://schemas.openxmlformats.org/presentationml/2006/main">
   <p:cSld>
     <p:spTree>
@@ -10166,7 +9890,7 @@
 </p:sld>
 </file>
 
-<file path=ppt/slides/slide31.xml><?xml version="1.0" encoding="utf-8"?>
+<file path=ppt/slides/slide29.xml><?xml version="1.0" encoding="utf-8"?>
 <p:sld xmlns:a="http://schemas.openxmlformats.org/drawingml/2006/main" xmlns:r="http://schemas.openxmlformats.org/officeDocument/2006/relationships" xmlns:p="http://schemas.openxmlformats.org/presentationml/2006/main">
   <p:cSld>
     <p:spTree>
@@ -11565,7 +11289,121 @@
 </p:sld>
 </file>
 
-<file path=ppt/slides/slide32.xml><?xml version="1.0" encoding="utf-8"?>
+<file path=ppt/slides/slide3.xml><?xml version="1.0" encoding="utf-8"?>
+<p:sld xmlns:a="http://schemas.openxmlformats.org/drawingml/2006/main" xmlns:r="http://schemas.openxmlformats.org/officeDocument/2006/relationships" xmlns:p="http://schemas.openxmlformats.org/presentationml/2006/main">
+  <p:cSld>
+    <p:spTree>
+      <p:nvGrpSpPr>
+        <p:cNvPr id="1" name="">
+          <a:extLst>
+            <a:ext uri="{FF2B5EF4-FFF2-40B4-BE49-F238E27FC236}">
+              <a16:creationId xmlns:a16="http://schemas.microsoft.com/office/drawing/2014/main" id="{E620A041-FE82-840D-7717-64C398D70767}"/>
+            </a:ext>
+          </a:extLst>
+        </p:cNvPr>
+        <p:cNvGrpSpPr/>
+        <p:nvPr/>
+      </p:nvGrpSpPr>
+      <p:grpSpPr>
+        <a:xfrm>
+          <a:off x="0" y="0"/>
+          <a:ext cx="0" cy="0"/>
+          <a:chOff x="0" y="0"/>
+          <a:chExt cx="0" cy="0"/>
+        </a:xfrm>
+      </p:grpSpPr>
+      <p:sp>
+        <p:nvSpPr>
+          <p:cNvPr id="2" name="Título 1">
+            <a:extLst>
+              <a:ext uri="{FF2B5EF4-FFF2-40B4-BE49-F238E27FC236}">
+                <a16:creationId xmlns:a16="http://schemas.microsoft.com/office/drawing/2014/main" id="{5E300191-0A2C-CA51-1D38-1273110471D8}"/>
+              </a:ext>
+            </a:extLst>
+          </p:cNvPr>
+          <p:cNvSpPr>
+            <a:spLocks noGrp="1"/>
+          </p:cNvSpPr>
+          <p:nvPr>
+            <p:ph type="title"/>
+          </p:nvPr>
+        </p:nvSpPr>
+        <p:spPr/>
+        <p:txBody>
+          <a:bodyPr/>
+          <a:lstStyle/>
+          <a:p>
+            <a:r>
+              <a:rPr lang="es-ES" dirty="0" err="1"/>
+              <a:t>Different</a:t>
+            </a:r>
+            <a:r>
+              <a:rPr lang="es-ES" dirty="0"/>
+              <a:t> </a:t>
+            </a:r>
+            <a:r>
+              <a:rPr lang="es-ES" dirty="0" err="1"/>
+              <a:t>ways</a:t>
+            </a:r>
+            <a:r>
+              <a:rPr lang="es-ES" dirty="0"/>
+              <a:t> </a:t>
+            </a:r>
+            <a:r>
+              <a:rPr lang="es-ES" dirty="0" err="1"/>
+              <a:t>to</a:t>
+            </a:r>
+            <a:r>
+              <a:rPr lang="es-ES" dirty="0"/>
+              <a:t> produce </a:t>
+            </a:r>
+            <a:r>
+              <a:rPr lang="es-ES" dirty="0" err="1"/>
+              <a:t>mutations</a:t>
+            </a:r>
+            <a:endParaRPr lang="es-CO" dirty="0"/>
+          </a:p>
+        </p:txBody>
+      </p:sp>
+      <p:sp>
+        <p:nvSpPr>
+          <p:cNvPr id="4" name="Marcador de texto 3">
+            <a:extLst>
+              <a:ext uri="{FF2B5EF4-FFF2-40B4-BE49-F238E27FC236}">
+                <a16:creationId xmlns:a16="http://schemas.microsoft.com/office/drawing/2014/main" id="{448487E8-B8C0-FCFC-CF4A-453B4E23F8A9}"/>
+              </a:ext>
+            </a:extLst>
+          </p:cNvPr>
+          <p:cNvSpPr>
+            <a:spLocks noGrp="1"/>
+          </p:cNvSpPr>
+          <p:nvPr>
+            <p:ph type="body" idx="1"/>
+          </p:nvPr>
+        </p:nvSpPr>
+        <p:spPr/>
+        <p:txBody>
+          <a:bodyPr/>
+          <a:lstStyle/>
+          <a:p>
+            <a:endParaRPr lang="es-CO"/>
+          </a:p>
+        </p:txBody>
+      </p:sp>
+    </p:spTree>
+    <p:extLst>
+      <p:ext uri="{BB962C8B-B14F-4D97-AF65-F5344CB8AC3E}">
+        <p14:creationId xmlns:p14="http://schemas.microsoft.com/office/powerpoint/2010/main" val="1077930712"/>
+      </p:ext>
+    </p:extLst>
+  </p:cSld>
+  <p:clrMapOvr>
+    <a:masterClrMapping/>
+  </p:clrMapOvr>
+</p:sld>
+</file>
+
+<file path=ppt/slides/slide30.xml><?xml version="1.0" encoding="utf-8"?>
 <p:sld xmlns:a="http://schemas.openxmlformats.org/drawingml/2006/main" xmlns:r="http://schemas.openxmlformats.org/officeDocument/2006/relationships" xmlns:p="http://schemas.openxmlformats.org/presentationml/2006/main">
   <p:cSld>
     <p:spTree>
@@ -12973,7 +12811,7 @@
 </p:sld>
 </file>
 
-<file path=ppt/slides/slide33.xml><?xml version="1.0" encoding="utf-8"?>
+<file path=ppt/slides/slide31.xml><?xml version="1.0" encoding="utf-8"?>
 <p:sld xmlns:a="http://schemas.openxmlformats.org/drawingml/2006/main" xmlns:r="http://schemas.openxmlformats.org/officeDocument/2006/relationships" xmlns:p="http://schemas.openxmlformats.org/presentationml/2006/main">
   <p:cSld>
     <p:spTree>
@@ -14036,7 +13874,7 @@
 </p:sld>
 </file>
 
-<file path=ppt/slides/slide34.xml><?xml version="1.0" encoding="utf-8"?>
+<file path=ppt/slides/slide32.xml><?xml version="1.0" encoding="utf-8"?>
 <p:sld xmlns:a="http://schemas.openxmlformats.org/drawingml/2006/main" xmlns:r="http://schemas.openxmlformats.org/officeDocument/2006/relationships" xmlns:p="http://schemas.openxmlformats.org/presentationml/2006/main">
   <p:cSld>
     <p:spTree>
@@ -15589,7 +15427,7 @@
 </p:sld>
 </file>
 
-<file path=ppt/slides/slide35.xml><?xml version="1.0" encoding="utf-8"?>
+<file path=ppt/slides/slide33.xml><?xml version="1.0" encoding="utf-8"?>
 <p:sld xmlns:a="http://schemas.openxmlformats.org/drawingml/2006/main" xmlns:r="http://schemas.openxmlformats.org/officeDocument/2006/relationships" xmlns:p="http://schemas.openxmlformats.org/presentationml/2006/main">
   <p:cSld>
     <p:spTree>
@@ -17119,7 +16957,7 @@
 </p:sld>
 </file>
 
-<file path=ppt/slides/slide36.xml><?xml version="1.0" encoding="utf-8"?>
+<file path=ppt/slides/slide34.xml><?xml version="1.0" encoding="utf-8"?>
 <p:sld xmlns:a="http://schemas.openxmlformats.org/drawingml/2006/main" xmlns:r="http://schemas.openxmlformats.org/officeDocument/2006/relationships" xmlns:p="http://schemas.openxmlformats.org/presentationml/2006/main">
   <p:cSld>
     <p:spTree>
@@ -17586,7 +17424,7 @@
 </p:sld>
 </file>
 
-<file path=ppt/slides/slide37.xml><?xml version="1.0" encoding="utf-8"?>
+<file path=ppt/slides/slide35.xml><?xml version="1.0" encoding="utf-8"?>
 <p:sld xmlns:a="http://schemas.openxmlformats.org/drawingml/2006/main" xmlns:r="http://schemas.openxmlformats.org/officeDocument/2006/relationships" xmlns:p="http://schemas.openxmlformats.org/presentationml/2006/main">
   <p:cSld>
     <p:spTree>
